--- a/BaoCao_TienDo_DangKyHocPhan_De15.pptx
+++ b/BaoCao_TienDo_DangKyHocPhan_De15.pptx
@@ -5960,7 +5960,7 @@
                         </a:defRPr>
                       </a:pPr>
                       <a:r>
-                        <a:t>Nâng cao: Trợ lý AI và Xuất báo cáo (Excel/PDF) từ dữ liệu thật</a:t>
+                        <a:t>Nâng cao: Thanh toán VietQR Napas247, Trợ lý AI và Xuất báo cáo (Excel/PDF)</a:t>
                       </a:r>
                     </a:p>
                   </a:txBody>
@@ -5984,7 +5984,7 @@
                         </a:defRPr>
                       </a:pPr>
                       <a:r>
-                        <a:t>Demo Cố vấn AI và Xuất file PDF/Excel</a:t>
+                        <a:t>Demo VietQR, Cố vấn AI và Xuất file PDF/Excel</a:t>
                       </a:r>
                     </a:p>
                   </a:txBody>
@@ -6008,7 +6008,7 @@
                         </a:defRPr>
                       </a:pPr>
                       <a:r>
-                        <a:t>ReportExportService</a:t>
+                        <a:t>Tuition &amp; Report</a:t>
                       </a:r>
                     </a:p>
                   </a:txBody>
